--- a/data-eng/decks/w5d1s0.pptx
+++ b/data-eng/decks/w5d1s0.pptx
@@ -5371,7 +5371,7 @@
                 <a:ea typeface="Pretendard"/>
                 <a:cs typeface="Pretendard"/>
               </a:rPr>
-              <a:t>4주차 테이블은 지우지 않는다 — 5-3 에서 다시 쓴다</a:t>
+              <a:t>4주차 테이블은 지우지 않는다 — 4주차 결과물</a:t>
             </a:r>
           </a:p>
         </p:txBody>
@@ -7271,7 +7271,7 @@
                 <a:ea typeface="Pretendard"/>
                 <a:cs typeface="Pretendard"/>
               </a:rPr>
-              <a:t>down -v 는 4주차 테이블을 지운다 — 5-3 에서 다시 쓴다</a:t>
+              <a:t>down -v 는 4주차 테이블을 지운다 — 4주차 결과물</a:t>
             </a:r>
           </a:p>
         </p:txBody>

--- a/data-eng/decks/w5d1s0.pptx
+++ b/data-eng/decks/w5d1s0.pptx
@@ -5476,7 +5476,7 @@
                 <a:ea typeface="Pretendard"/>
                 <a:cs typeface="Pretendard"/>
               </a:rPr>
-              <a:t>1 4주차 멈추기</a:t>
+              <a:t>1. 4주차 멈추기</a:t>
             </a:r>
           </a:p>
         </p:txBody>
@@ -5640,7 +5640,7 @@
                 <a:ea typeface="Pretendard"/>
                 <a:cs typeface="Pretendard"/>
               </a:rPr>
-              <a:t>2 4040 확인</a:t>
+              <a:t>2. 4040 확인</a:t>
             </a:r>
           </a:p>
         </p:txBody>
@@ -5804,7 +5804,7 @@
                 <a:ea typeface="Pretendard"/>
                 <a:cs typeface="Pretendard"/>
               </a:rPr>
-              <a:t>3 이미지 받기</a:t>
+              <a:t>3. 이미지 받기</a:t>
             </a:r>
           </a:p>
         </p:txBody>
@@ -5968,7 +5968,7 @@
                 <a:ea typeface="Pretendard"/>
                 <a:cs typeface="Pretendard"/>
               </a:rPr>
-              <a:t>4 오늘 만들 것</a:t>
+              <a:t>4. 오늘 만들 것</a:t>
             </a:r>
           </a:p>
         </p:txBody>
@@ -6132,7 +6132,7 @@
                 <a:ea typeface="Pretendard"/>
                 <a:cs typeface="Pretendard"/>
               </a:rPr>
-              <a:t>5 환경 재설정</a:t>
+              <a:t>5. 환경 재설정</a:t>
             </a:r>
           </a:p>
         </p:txBody>
